--- a/material/2_Python/06_셋.pptx
+++ b/material/2_Python/06_셋.pptx
@@ -37,7 +37,7 @@
   <p:notesSz cx="6858000" cy="9144000"/>
   <p:embeddedFontLst>
     <p:embeddedFont>
-      <p:font typeface="Kim jung chul Gothic Regular" panose="020B0503000000000000" pitchFamily="50" charset="-127"/>
+      <p:font typeface="Kim jung chul Gothic Regular" panose="020B0600000101010101" charset="-127"/>
       <p:regular r:id="rId27"/>
     </p:embeddedFont>
     <p:embeddedFont>
@@ -45,15 +45,15 @@
       <p:bold r:id="rId28"/>
     </p:embeddedFont>
     <p:embeddedFont>
-      <p:font typeface="Pretendard Black" panose="02000A03000000020004" pitchFamily="2" charset="-127"/>
+      <p:font typeface="Pretendard Black" panose="02000A03000000020004" pitchFamily="50" charset="-127"/>
       <p:bold r:id="rId29"/>
     </p:embeddedFont>
     <p:embeddedFont>
-      <p:font typeface="Pretendard Light" panose="02000403000000020004" pitchFamily="2" charset="-127"/>
+      <p:font typeface="Pretendard Light" panose="02000403000000020004" pitchFamily="50" charset="-127"/>
       <p:regular r:id="rId30"/>
     </p:embeddedFont>
     <p:embeddedFont>
-      <p:font typeface="Pretendard Medium" panose="02000603000000020004" pitchFamily="2" charset="-127"/>
+      <p:font typeface="Pretendard Medium" panose="02000603000000020004" pitchFamily="50" charset="-127"/>
       <p:regular r:id="rId31"/>
     </p:embeddedFont>
     <p:embeddedFont>
@@ -273,7 +273,7 @@
             <a:fld id="{A13A867C-D490-40C2-AB8D-A60FA70A9BF5}" type="datetimeFigureOut">
               <a:rPr lang="ko-KR" altLang="en-US" smtClean="0"/>
               <a:pPr/>
-              <a:t>2025-09-01</a:t>
+              <a:t>2025-11-06</a:t>
             </a:fld>
             <a:endParaRPr lang="ko-KR" altLang="en-US" dirty="0"/>
           </a:p>
@@ -927,6 +927,610 @@
         <p:txBody>
           <a:bodyPr/>
           <a:lstStyle/>
+          <a:p>
+            <a:r>
+              <a:rPr lang="en-US" altLang="ko-KR" sz="1200" b="0" i="0" kern="1200" dirty="0">
+                <a:solidFill>
+                  <a:schemeClr val="tx1"/>
+                </a:solidFill>
+                <a:effectLst/>
+                <a:latin typeface="Kim jung chul Gothic Regular" panose="020B0503000000000000" pitchFamily="50" charset="-127"/>
+                <a:ea typeface="Kim jung chul Gothic Regular" panose="020B0503000000000000" pitchFamily="50" charset="-127"/>
+                <a:cs typeface="+mn-cs"/>
+              </a:rPr>
+              <a:t>Set</a:t>
+            </a:r>
+            <a:r>
+              <a:rPr lang="ko-KR" altLang="en-US" sz="1200" b="0" i="0" kern="1200" dirty="0">
+                <a:solidFill>
+                  <a:schemeClr val="tx1"/>
+                </a:solidFill>
+                <a:effectLst/>
+                <a:latin typeface="Kim jung chul Gothic Regular" panose="020B0503000000000000" pitchFamily="50" charset="-127"/>
+                <a:ea typeface="Kim jung chul Gothic Regular" panose="020B0503000000000000" pitchFamily="50" charset="-127"/>
+                <a:cs typeface="+mn-cs"/>
+              </a:rPr>
+              <a:t>은 내부적으로</a:t>
+            </a:r>
+            <a:r>
+              <a:rPr lang="en-US" altLang="ko-KR" sz="1200" b="0" i="0" kern="1200" dirty="0">
+                <a:solidFill>
+                  <a:schemeClr val="tx1"/>
+                </a:solidFill>
+                <a:effectLst/>
+                <a:latin typeface="Kim jung chul Gothic Regular" panose="020B0503000000000000" pitchFamily="50" charset="-127"/>
+                <a:ea typeface="Kim jung chul Gothic Regular" panose="020B0503000000000000" pitchFamily="50" charset="-127"/>
+                <a:cs typeface="+mn-cs"/>
+              </a:rPr>
+              <a:t> </a:t>
+            </a:r>
+            <a:r>
+              <a:rPr lang="ko-KR" altLang="en-US" sz="1200" b="0" i="0" kern="1200" dirty="0" err="1">
+                <a:solidFill>
+                  <a:schemeClr val="tx1"/>
+                </a:solidFill>
+                <a:effectLst/>
+                <a:latin typeface="Kim jung chul Gothic Regular" panose="020B0503000000000000" pitchFamily="50" charset="-127"/>
+                <a:ea typeface="Kim jung chul Gothic Regular" panose="020B0503000000000000" pitchFamily="50" charset="-127"/>
+                <a:cs typeface="+mn-cs"/>
+              </a:rPr>
+              <a:t>해시값을</a:t>
+            </a:r>
+            <a:r>
+              <a:rPr lang="ko-KR" altLang="en-US" sz="1200" b="0" i="0" kern="1200" dirty="0">
+                <a:solidFill>
+                  <a:schemeClr val="tx1"/>
+                </a:solidFill>
+                <a:effectLst/>
+                <a:latin typeface="Kim jung chul Gothic Regular" panose="020B0503000000000000" pitchFamily="50" charset="-127"/>
+                <a:ea typeface="Kim jung chul Gothic Regular" panose="020B0503000000000000" pitchFamily="50" charset="-127"/>
+                <a:cs typeface="+mn-cs"/>
+              </a:rPr>
+              <a:t> 기준으로 위치를 정한다 </a:t>
+            </a:r>
+            <a:r>
+              <a:rPr lang="en-US" altLang="ko-KR" sz="1200" b="0" i="0" kern="1200" dirty="0">
+                <a:solidFill>
+                  <a:schemeClr val="tx1"/>
+                </a:solidFill>
+                <a:effectLst/>
+                <a:latin typeface="Kim jung chul Gothic Regular" panose="020B0503000000000000" pitchFamily="50" charset="-127"/>
+                <a:ea typeface="Kim jung chul Gothic Regular" panose="020B0503000000000000" pitchFamily="50" charset="-127"/>
+                <a:cs typeface="+mn-cs"/>
+              </a:rPr>
+              <a:t>=&gt; </a:t>
+            </a:r>
+            <a:r>
+              <a:rPr lang="ko-KR" altLang="en-US" sz="1200" b="0" i="0" kern="1200" dirty="0">
+                <a:solidFill>
+                  <a:schemeClr val="tx1"/>
+                </a:solidFill>
+                <a:effectLst/>
+                <a:latin typeface="Kim jung chul Gothic Regular" panose="020B0503000000000000" pitchFamily="50" charset="-127"/>
+                <a:ea typeface="Kim jung chul Gothic Regular" panose="020B0503000000000000" pitchFamily="50" charset="-127"/>
+                <a:cs typeface="+mn-cs"/>
+              </a:rPr>
+              <a:t> **해시 가능</a:t>
+            </a:r>
+            <a:r>
+              <a:rPr lang="en-US" altLang="ko-KR" sz="1200" b="0" i="0" kern="1200" dirty="0">
+                <a:solidFill>
+                  <a:schemeClr val="tx1"/>
+                </a:solidFill>
+                <a:effectLst/>
+                <a:latin typeface="Kim jung chul Gothic Regular" panose="020B0503000000000000" pitchFamily="50" charset="-127"/>
+                <a:ea typeface="Kim jung chul Gothic Regular" panose="020B0503000000000000" pitchFamily="50" charset="-127"/>
+                <a:cs typeface="+mn-cs"/>
+              </a:rPr>
+              <a:t>(</a:t>
+            </a:r>
+            <a:r>
+              <a:rPr lang="en-US" altLang="ko-KR" sz="1200" b="0" i="0" kern="1200" dirty="0" err="1">
+                <a:solidFill>
+                  <a:schemeClr val="tx1"/>
+                </a:solidFill>
+                <a:effectLst/>
+                <a:latin typeface="Kim jung chul Gothic Regular" panose="020B0503000000000000" pitchFamily="50" charset="-127"/>
+                <a:ea typeface="Kim jung chul Gothic Regular" panose="020B0503000000000000" pitchFamily="50" charset="-127"/>
+                <a:cs typeface="+mn-cs"/>
+              </a:rPr>
+              <a:t>hashable</a:t>
+            </a:r>
+            <a:r>
+              <a:rPr lang="en-US" altLang="ko-KR" sz="1200" b="0" i="0" kern="1200" dirty="0">
+                <a:solidFill>
+                  <a:schemeClr val="tx1"/>
+                </a:solidFill>
+                <a:effectLst/>
+                <a:latin typeface="Kim jung chul Gothic Regular" panose="020B0503000000000000" pitchFamily="50" charset="-127"/>
+                <a:ea typeface="Kim jung chul Gothic Regular" panose="020B0503000000000000" pitchFamily="50" charset="-127"/>
+                <a:cs typeface="+mn-cs"/>
+              </a:rPr>
+              <a:t>)**</a:t>
+            </a:r>
+            <a:r>
+              <a:rPr lang="ko-KR" altLang="en-US" sz="1200" b="0" i="0" kern="1200" dirty="0">
+                <a:solidFill>
+                  <a:schemeClr val="tx1"/>
+                </a:solidFill>
+                <a:effectLst/>
+                <a:latin typeface="Kim jung chul Gothic Regular" panose="020B0503000000000000" pitchFamily="50" charset="-127"/>
+                <a:ea typeface="Kim jung chul Gothic Regular" panose="020B0503000000000000" pitchFamily="50" charset="-127"/>
+                <a:cs typeface="+mn-cs"/>
+              </a:rPr>
+              <a:t>한 요소만 저장할 수 있습니다</a:t>
+            </a:r>
+            <a:r>
+              <a:rPr lang="en-US" altLang="ko-KR" sz="1200" b="0" i="0" kern="1200" dirty="0">
+                <a:solidFill>
+                  <a:schemeClr val="tx1"/>
+                </a:solidFill>
+                <a:effectLst/>
+                <a:latin typeface="Kim jung chul Gothic Regular" panose="020B0503000000000000" pitchFamily="50" charset="-127"/>
+                <a:ea typeface="Kim jung chul Gothic Regular" panose="020B0503000000000000" pitchFamily="50" charset="-127"/>
+                <a:cs typeface="+mn-cs"/>
+              </a:rPr>
+              <a:t>.</a:t>
+            </a:r>
+          </a:p>
+          <a:p>
+            <a:r>
+              <a:rPr lang="en-US" altLang="ko-KR" sz="1200" b="0" i="0" kern="1200" dirty="0">
+                <a:solidFill>
+                  <a:schemeClr val="tx1"/>
+                </a:solidFill>
+                <a:effectLst/>
+                <a:latin typeface="Kim jung chul Gothic Regular" panose="020B0503000000000000" pitchFamily="50" charset="-127"/>
+                <a:ea typeface="Kim jung chul Gothic Regular" panose="020B0503000000000000" pitchFamily="50" charset="-127"/>
+                <a:cs typeface="+mn-cs"/>
+              </a:rPr>
+              <a:t>**</a:t>
+            </a:r>
+            <a:r>
+              <a:rPr lang="ko-KR" altLang="en-US" sz="1200" b="0" i="0" kern="1200" dirty="0">
+                <a:solidFill>
+                  <a:schemeClr val="tx1"/>
+                </a:solidFill>
+                <a:effectLst/>
+                <a:latin typeface="Kim jung chul Gothic Regular" panose="020B0503000000000000" pitchFamily="50" charset="-127"/>
+                <a:ea typeface="Kim jung chul Gothic Regular" panose="020B0503000000000000" pitchFamily="50" charset="-127"/>
+                <a:cs typeface="+mn-cs"/>
+              </a:rPr>
+              <a:t>변경 불가능</a:t>
+            </a:r>
+            <a:r>
+              <a:rPr lang="en-US" altLang="ko-KR" sz="1200" b="0" i="0" kern="1200" dirty="0">
+                <a:solidFill>
+                  <a:schemeClr val="tx1"/>
+                </a:solidFill>
+                <a:effectLst/>
+                <a:latin typeface="Kim jung chul Gothic Regular" panose="020B0503000000000000" pitchFamily="50" charset="-127"/>
+                <a:ea typeface="Kim jung chul Gothic Regular" panose="020B0503000000000000" pitchFamily="50" charset="-127"/>
+                <a:cs typeface="+mn-cs"/>
+              </a:rPr>
+              <a:t>(immutable)**</a:t>
+            </a:r>
+            <a:r>
+              <a:rPr lang="ko-KR" altLang="en-US" sz="1200" b="0" i="0" kern="1200" dirty="0">
+                <a:solidFill>
+                  <a:schemeClr val="tx1"/>
+                </a:solidFill>
+                <a:effectLst/>
+                <a:latin typeface="Kim jung chul Gothic Regular" panose="020B0503000000000000" pitchFamily="50" charset="-127"/>
+                <a:ea typeface="Kim jung chul Gothic Regular" panose="020B0503000000000000" pitchFamily="50" charset="-127"/>
+                <a:cs typeface="+mn-cs"/>
+              </a:rPr>
+              <a:t>한 데이터 타입</a:t>
+            </a:r>
+            <a:r>
+              <a:rPr lang="en-US" altLang="ko-KR" sz="1200" b="0" i="0" kern="1200" dirty="0">
+                <a:solidFill>
+                  <a:schemeClr val="tx1"/>
+                </a:solidFill>
+                <a:effectLst/>
+                <a:latin typeface="Kim jung chul Gothic Regular" panose="020B0503000000000000" pitchFamily="50" charset="-127"/>
+                <a:ea typeface="Kim jung chul Gothic Regular" panose="020B0503000000000000" pitchFamily="50" charset="-127"/>
+                <a:cs typeface="+mn-cs"/>
+              </a:rPr>
+              <a:t>(</a:t>
+            </a:r>
+            <a:r>
+              <a:rPr lang="ko-KR" altLang="en-US" sz="1200" b="0" i="0" kern="1200" dirty="0">
+                <a:solidFill>
+                  <a:schemeClr val="tx1"/>
+                </a:solidFill>
+                <a:effectLst/>
+                <a:latin typeface="Kim jung chul Gothic Regular" panose="020B0503000000000000" pitchFamily="50" charset="-127"/>
+                <a:ea typeface="Kim jung chul Gothic Regular" panose="020B0503000000000000" pitchFamily="50" charset="-127"/>
+                <a:cs typeface="+mn-cs"/>
+              </a:rPr>
+              <a:t>예</a:t>
+            </a:r>
+            <a:r>
+              <a:rPr lang="en-US" altLang="ko-KR" sz="1200" b="0" i="0" kern="1200" dirty="0">
+                <a:solidFill>
+                  <a:schemeClr val="tx1"/>
+                </a:solidFill>
+                <a:effectLst/>
+                <a:latin typeface="Kim jung chul Gothic Regular" panose="020B0503000000000000" pitchFamily="50" charset="-127"/>
+                <a:ea typeface="Kim jung chul Gothic Regular" panose="020B0503000000000000" pitchFamily="50" charset="-127"/>
+                <a:cs typeface="+mn-cs"/>
+              </a:rPr>
+              <a:t>: </a:t>
+            </a:r>
+            <a:r>
+              <a:rPr lang="ko-KR" altLang="en-US" sz="1200" b="0" i="0" kern="1200" dirty="0">
+                <a:solidFill>
+                  <a:schemeClr val="tx1"/>
+                </a:solidFill>
+                <a:effectLst/>
+                <a:latin typeface="Kim jung chul Gothic Regular" panose="020B0503000000000000" pitchFamily="50" charset="-127"/>
+                <a:ea typeface="Kim jung chul Gothic Regular" panose="020B0503000000000000" pitchFamily="50" charset="-127"/>
+                <a:cs typeface="+mn-cs"/>
+              </a:rPr>
+              <a:t>숫자</a:t>
+            </a:r>
+            <a:r>
+              <a:rPr lang="en-US" altLang="ko-KR" sz="1200" b="0" i="0" kern="1200" dirty="0">
+                <a:solidFill>
+                  <a:schemeClr val="tx1"/>
+                </a:solidFill>
+                <a:effectLst/>
+                <a:latin typeface="Kim jung chul Gothic Regular" panose="020B0503000000000000" pitchFamily="50" charset="-127"/>
+                <a:ea typeface="Kim jung chul Gothic Regular" panose="020B0503000000000000" pitchFamily="50" charset="-127"/>
+                <a:cs typeface="+mn-cs"/>
+              </a:rPr>
+              <a:t>, </a:t>
+            </a:r>
+            <a:r>
+              <a:rPr lang="ko-KR" altLang="en-US" sz="1200" b="0" i="0" kern="1200" dirty="0">
+                <a:solidFill>
+                  <a:schemeClr val="tx1"/>
+                </a:solidFill>
+                <a:effectLst/>
+                <a:latin typeface="Kim jung chul Gothic Regular" panose="020B0503000000000000" pitchFamily="50" charset="-127"/>
+                <a:ea typeface="Kim jung chul Gothic Regular" panose="020B0503000000000000" pitchFamily="50" charset="-127"/>
+                <a:cs typeface="+mn-cs"/>
+              </a:rPr>
+              <a:t>문자열</a:t>
+            </a:r>
+            <a:r>
+              <a:rPr lang="en-US" altLang="ko-KR" sz="1200" b="0" i="0" kern="1200" dirty="0">
+                <a:solidFill>
+                  <a:schemeClr val="tx1"/>
+                </a:solidFill>
+                <a:effectLst/>
+                <a:latin typeface="Kim jung chul Gothic Regular" panose="020B0503000000000000" pitchFamily="50" charset="-127"/>
+                <a:ea typeface="Kim jung chul Gothic Regular" panose="020B0503000000000000" pitchFamily="50" charset="-127"/>
+                <a:cs typeface="+mn-cs"/>
+              </a:rPr>
+              <a:t>, </a:t>
+            </a:r>
+            <a:r>
+              <a:rPr lang="ko-KR" altLang="en-US" sz="1200" b="0" i="0" kern="1200" dirty="0" err="1">
+                <a:solidFill>
+                  <a:schemeClr val="tx1"/>
+                </a:solidFill>
+                <a:effectLst/>
+                <a:latin typeface="Kim jung chul Gothic Regular" panose="020B0503000000000000" pitchFamily="50" charset="-127"/>
+                <a:ea typeface="Kim jung chul Gothic Regular" panose="020B0503000000000000" pitchFamily="50" charset="-127"/>
+                <a:cs typeface="+mn-cs"/>
+              </a:rPr>
+              <a:t>튜플</a:t>
+            </a:r>
+            <a:r>
+              <a:rPr lang="en-US" altLang="ko-KR" sz="1200" b="0" i="0" kern="1200" dirty="0">
+                <a:solidFill>
+                  <a:schemeClr val="tx1"/>
+                </a:solidFill>
+                <a:effectLst/>
+                <a:latin typeface="Kim jung chul Gothic Regular" panose="020B0503000000000000" pitchFamily="50" charset="-127"/>
+                <a:ea typeface="Kim jung chul Gothic Regular" panose="020B0503000000000000" pitchFamily="50" charset="-127"/>
+                <a:cs typeface="+mn-cs"/>
+              </a:rPr>
+              <a:t>)</a:t>
+            </a:r>
+            <a:r>
+              <a:rPr lang="ko-KR" altLang="en-US" sz="1200" b="0" i="0" kern="1200" dirty="0">
+                <a:solidFill>
+                  <a:schemeClr val="tx1"/>
+                </a:solidFill>
+                <a:effectLst/>
+                <a:latin typeface="Kim jung chul Gothic Regular" panose="020B0503000000000000" pitchFamily="50" charset="-127"/>
+                <a:ea typeface="Kim jung chul Gothic Regular" panose="020B0503000000000000" pitchFamily="50" charset="-127"/>
+                <a:cs typeface="+mn-cs"/>
+              </a:rPr>
+              <a:t>만이 해시 가능하므로 </a:t>
+            </a:r>
+            <a:r>
+              <a:rPr lang="en-US" altLang="ko-KR" sz="1200" b="0" i="0" kern="1200" dirty="0">
+                <a:solidFill>
+                  <a:schemeClr val="tx1"/>
+                </a:solidFill>
+                <a:effectLst/>
+                <a:latin typeface="Kim jung chul Gothic Regular" panose="020B0503000000000000" pitchFamily="50" charset="-127"/>
+                <a:ea typeface="Kim jung chul Gothic Regular" panose="020B0503000000000000" pitchFamily="50" charset="-127"/>
+                <a:cs typeface="+mn-cs"/>
+              </a:rPr>
+              <a:t>set</a:t>
+            </a:r>
+            <a:r>
+              <a:rPr lang="ko-KR" altLang="en-US" sz="1200" b="0" i="0" kern="1200" dirty="0">
+                <a:solidFill>
+                  <a:schemeClr val="tx1"/>
+                </a:solidFill>
+                <a:effectLst/>
+                <a:latin typeface="Kim jung chul Gothic Regular" panose="020B0503000000000000" pitchFamily="50" charset="-127"/>
+                <a:ea typeface="Kim jung chul Gothic Regular" panose="020B0503000000000000" pitchFamily="50" charset="-127"/>
+                <a:cs typeface="+mn-cs"/>
+              </a:rPr>
+              <a:t>의 요소가 될 수 있습니다</a:t>
+            </a:r>
+            <a:r>
+              <a:rPr lang="en-US" altLang="ko-KR" sz="1200" b="0" i="0" kern="1200" dirty="0">
+                <a:solidFill>
+                  <a:schemeClr val="tx1"/>
+                </a:solidFill>
+                <a:effectLst/>
+                <a:latin typeface="Kim jung chul Gothic Regular" panose="020B0503000000000000" pitchFamily="50" charset="-127"/>
+                <a:ea typeface="Kim jung chul Gothic Regular" panose="020B0503000000000000" pitchFamily="50" charset="-127"/>
+                <a:cs typeface="+mn-cs"/>
+              </a:rPr>
+              <a:t>.</a:t>
+            </a:r>
+          </a:p>
+          <a:p>
+            <a:r>
+              <a:rPr lang="en-US" altLang="ko-KR" sz="1200" b="0" i="0" kern="1200" dirty="0">
+                <a:solidFill>
+                  <a:schemeClr val="tx1"/>
+                </a:solidFill>
+                <a:effectLst/>
+                <a:latin typeface="Kim jung chul Gothic Regular" panose="020B0503000000000000" pitchFamily="50" charset="-127"/>
+                <a:ea typeface="Kim jung chul Gothic Regular" panose="020B0503000000000000" pitchFamily="50" charset="-127"/>
+                <a:cs typeface="+mn-cs"/>
+              </a:rPr>
+              <a:t>**</a:t>
+            </a:r>
+            <a:r>
+              <a:rPr lang="ko-KR" altLang="en-US" sz="1200" b="0" i="0" kern="1200" dirty="0">
+                <a:solidFill>
+                  <a:schemeClr val="tx1"/>
+                </a:solidFill>
+                <a:effectLst/>
+                <a:latin typeface="Kim jung chul Gothic Regular" panose="020B0503000000000000" pitchFamily="50" charset="-127"/>
+                <a:ea typeface="Kim jung chul Gothic Regular" panose="020B0503000000000000" pitchFamily="50" charset="-127"/>
+                <a:cs typeface="+mn-cs"/>
+              </a:rPr>
+              <a:t>변경 가능</a:t>
+            </a:r>
+            <a:r>
+              <a:rPr lang="en-US" altLang="ko-KR" sz="1200" b="0" i="0" kern="1200" dirty="0">
+                <a:solidFill>
+                  <a:schemeClr val="tx1"/>
+                </a:solidFill>
+                <a:effectLst/>
+                <a:latin typeface="Kim jung chul Gothic Regular" panose="020B0503000000000000" pitchFamily="50" charset="-127"/>
+                <a:ea typeface="Kim jung chul Gothic Regular" panose="020B0503000000000000" pitchFamily="50" charset="-127"/>
+                <a:cs typeface="+mn-cs"/>
+              </a:rPr>
+              <a:t>(mutable)**</a:t>
+            </a:r>
+            <a:r>
+              <a:rPr lang="ko-KR" altLang="en-US" sz="1200" b="0" i="0" kern="1200" dirty="0">
+                <a:solidFill>
+                  <a:schemeClr val="tx1"/>
+                </a:solidFill>
+                <a:effectLst/>
+                <a:latin typeface="Kim jung chul Gothic Regular" panose="020B0503000000000000" pitchFamily="50" charset="-127"/>
+                <a:ea typeface="Kim jung chul Gothic Regular" panose="020B0503000000000000" pitchFamily="50" charset="-127"/>
+                <a:cs typeface="+mn-cs"/>
+              </a:rPr>
+              <a:t>한 데이터 타입</a:t>
+            </a:r>
+            <a:r>
+              <a:rPr lang="en-US" altLang="ko-KR" sz="1200" b="0" i="0" kern="1200" dirty="0">
+                <a:solidFill>
+                  <a:schemeClr val="tx1"/>
+                </a:solidFill>
+                <a:effectLst/>
+                <a:latin typeface="Kim jung chul Gothic Regular" panose="020B0503000000000000" pitchFamily="50" charset="-127"/>
+                <a:ea typeface="Kim jung chul Gothic Regular" panose="020B0503000000000000" pitchFamily="50" charset="-127"/>
+                <a:cs typeface="+mn-cs"/>
+              </a:rPr>
+              <a:t>(</a:t>
+            </a:r>
+            <a:r>
+              <a:rPr lang="ko-KR" altLang="en-US" sz="1200" b="0" i="0" kern="1200" dirty="0">
+                <a:solidFill>
+                  <a:schemeClr val="tx1"/>
+                </a:solidFill>
+                <a:effectLst/>
+                <a:latin typeface="Kim jung chul Gothic Regular" panose="020B0503000000000000" pitchFamily="50" charset="-127"/>
+                <a:ea typeface="Kim jung chul Gothic Regular" panose="020B0503000000000000" pitchFamily="50" charset="-127"/>
+                <a:cs typeface="+mn-cs"/>
+              </a:rPr>
+              <a:t>예</a:t>
+            </a:r>
+            <a:r>
+              <a:rPr lang="en-US" altLang="ko-KR" sz="1200" b="0" i="0" kern="1200" dirty="0">
+                <a:solidFill>
+                  <a:schemeClr val="tx1"/>
+                </a:solidFill>
+                <a:effectLst/>
+                <a:latin typeface="Kim jung chul Gothic Regular" panose="020B0503000000000000" pitchFamily="50" charset="-127"/>
+                <a:ea typeface="Kim jung chul Gothic Regular" panose="020B0503000000000000" pitchFamily="50" charset="-127"/>
+                <a:cs typeface="+mn-cs"/>
+              </a:rPr>
+              <a:t>: </a:t>
+            </a:r>
+            <a:r>
+              <a:rPr lang="ko-KR" altLang="en-US" sz="1200" b="0" i="0" kern="1200" dirty="0">
+                <a:solidFill>
+                  <a:schemeClr val="tx1"/>
+                </a:solidFill>
+                <a:effectLst/>
+                <a:latin typeface="Kim jung chul Gothic Regular" panose="020B0503000000000000" pitchFamily="50" charset="-127"/>
+                <a:ea typeface="Kim jung chul Gothic Regular" panose="020B0503000000000000" pitchFamily="50" charset="-127"/>
+                <a:cs typeface="+mn-cs"/>
+              </a:rPr>
+              <a:t>리스트</a:t>
+            </a:r>
+            <a:r>
+              <a:rPr lang="en-US" altLang="ko-KR" sz="1200" b="0" i="0" kern="1200" dirty="0">
+                <a:solidFill>
+                  <a:schemeClr val="tx1"/>
+                </a:solidFill>
+                <a:effectLst/>
+                <a:latin typeface="Kim jung chul Gothic Regular" panose="020B0503000000000000" pitchFamily="50" charset="-127"/>
+                <a:ea typeface="Kim jung chul Gothic Regular" panose="020B0503000000000000" pitchFamily="50" charset="-127"/>
+                <a:cs typeface="+mn-cs"/>
+              </a:rPr>
+              <a:t>, </a:t>
+            </a:r>
+            <a:r>
+              <a:rPr lang="ko-KR" altLang="en-US" sz="1200" b="0" i="0" kern="1200" dirty="0" err="1">
+                <a:solidFill>
+                  <a:schemeClr val="tx1"/>
+                </a:solidFill>
+                <a:effectLst/>
+                <a:latin typeface="Kim jung chul Gothic Regular" panose="020B0503000000000000" pitchFamily="50" charset="-127"/>
+                <a:ea typeface="Kim jung chul Gothic Regular" panose="020B0503000000000000" pitchFamily="50" charset="-127"/>
+                <a:cs typeface="+mn-cs"/>
+              </a:rPr>
+              <a:t>딕셔너리</a:t>
+            </a:r>
+            <a:r>
+              <a:rPr lang="en-US" altLang="ko-KR" sz="1200" b="0" i="0" kern="1200" dirty="0">
+                <a:solidFill>
+                  <a:schemeClr val="tx1"/>
+                </a:solidFill>
+                <a:effectLst/>
+                <a:latin typeface="Kim jung chul Gothic Regular" panose="020B0503000000000000" pitchFamily="50" charset="-127"/>
+                <a:ea typeface="Kim jung chul Gothic Regular" panose="020B0503000000000000" pitchFamily="50" charset="-127"/>
+                <a:cs typeface="+mn-cs"/>
+              </a:rPr>
+              <a:t>)</a:t>
+            </a:r>
+            <a:r>
+              <a:rPr lang="ko-KR" altLang="en-US" sz="1200" b="0" i="0" kern="1200" dirty="0">
+                <a:solidFill>
+                  <a:schemeClr val="tx1"/>
+                </a:solidFill>
+                <a:effectLst/>
+                <a:latin typeface="Kim jung chul Gothic Regular" panose="020B0503000000000000" pitchFamily="50" charset="-127"/>
+                <a:ea typeface="Kim jung chul Gothic Regular" panose="020B0503000000000000" pitchFamily="50" charset="-127"/>
+                <a:cs typeface="+mn-cs"/>
+              </a:rPr>
+              <a:t>은 값이 변경될 수 있으므로 해시 값을 가질 수 없어 </a:t>
+            </a:r>
+            <a:r>
+              <a:rPr lang="en-US" altLang="ko-KR" sz="1200" b="0" i="0" kern="1200" dirty="0">
+                <a:solidFill>
+                  <a:schemeClr val="tx1"/>
+                </a:solidFill>
+                <a:effectLst/>
+                <a:latin typeface="Kim jung chul Gothic Regular" panose="020B0503000000000000" pitchFamily="50" charset="-127"/>
+                <a:ea typeface="Kim jung chul Gothic Regular" panose="020B0503000000000000" pitchFamily="50" charset="-127"/>
+                <a:cs typeface="+mn-cs"/>
+              </a:rPr>
+              <a:t>set</a:t>
+            </a:r>
+            <a:r>
+              <a:rPr lang="ko-KR" altLang="en-US" sz="1200" b="0" i="0" kern="1200" dirty="0">
+                <a:solidFill>
+                  <a:schemeClr val="tx1"/>
+                </a:solidFill>
+                <a:effectLst/>
+                <a:latin typeface="Kim jung chul Gothic Regular" panose="020B0503000000000000" pitchFamily="50" charset="-127"/>
+                <a:ea typeface="Kim jung chul Gothic Regular" panose="020B0503000000000000" pitchFamily="50" charset="-127"/>
+                <a:cs typeface="+mn-cs"/>
+              </a:rPr>
+              <a:t>의 요소로 들어갈 수 없습니다</a:t>
+            </a:r>
+            <a:r>
+              <a:rPr lang="en-US" altLang="ko-KR" sz="1200" b="0" i="0" kern="1200" dirty="0">
+                <a:solidFill>
+                  <a:schemeClr val="tx1"/>
+                </a:solidFill>
+                <a:effectLst/>
+                <a:latin typeface="Kim jung chul Gothic Regular" panose="020B0503000000000000" pitchFamily="50" charset="-127"/>
+                <a:ea typeface="Kim jung chul Gothic Regular" panose="020B0503000000000000" pitchFamily="50" charset="-127"/>
+                <a:cs typeface="+mn-cs"/>
+              </a:rPr>
+              <a:t>. </a:t>
+            </a:r>
+          </a:p>
+          <a:p>
+            <a:r>
+              <a:rPr lang="en-US" altLang="ko-KR" sz="1200" b="0" i="0" kern="1200" dirty="0">
+                <a:solidFill>
+                  <a:schemeClr val="tx1"/>
+                </a:solidFill>
+                <a:effectLst/>
+                <a:latin typeface="Kim jung chul Gothic Regular" panose="020B0503000000000000" pitchFamily="50" charset="-127"/>
+                <a:ea typeface="Kim jung chul Gothic Regular" panose="020B0503000000000000" pitchFamily="50" charset="-127"/>
+                <a:cs typeface="+mn-cs"/>
+              </a:rPr>
+              <a:t>Obj</a:t>
+            </a:r>
+            <a:r>
+              <a:rPr lang="ko-KR" altLang="en-US" sz="1200" b="0" i="0" kern="1200" dirty="0">
+                <a:solidFill>
+                  <a:schemeClr val="tx1"/>
+                </a:solidFill>
+                <a:effectLst/>
+                <a:latin typeface="Kim jung chul Gothic Regular" panose="020B0503000000000000" pitchFamily="50" charset="-127"/>
+                <a:ea typeface="Kim jung chul Gothic Regular" panose="020B0503000000000000" pitchFamily="50" charset="-127"/>
+                <a:cs typeface="+mn-cs"/>
+              </a:rPr>
+              <a:t>의 값이 변경된다면 </a:t>
+            </a:r>
+            <a:r>
+              <a:rPr lang="ko-KR" altLang="en-US" sz="1200" b="0" i="0" kern="1200" dirty="0" err="1">
+                <a:solidFill>
+                  <a:schemeClr val="tx1"/>
+                </a:solidFill>
+                <a:effectLst/>
+                <a:latin typeface="Kim jung chul Gothic Regular" panose="020B0503000000000000" pitchFamily="50" charset="-127"/>
+                <a:ea typeface="Kim jung chul Gothic Regular" panose="020B0503000000000000" pitchFamily="50" charset="-127"/>
+                <a:cs typeface="+mn-cs"/>
+              </a:rPr>
+              <a:t>해시값도</a:t>
+            </a:r>
+            <a:r>
+              <a:rPr lang="ko-KR" altLang="en-US" sz="1200" b="0" i="0" kern="1200" dirty="0">
+                <a:solidFill>
+                  <a:schemeClr val="tx1"/>
+                </a:solidFill>
+                <a:effectLst/>
+                <a:latin typeface="Kim jung chul Gothic Regular" panose="020B0503000000000000" pitchFamily="50" charset="-127"/>
+                <a:ea typeface="Kim jung chul Gothic Regular" panose="020B0503000000000000" pitchFamily="50" charset="-127"/>
+                <a:cs typeface="+mn-cs"/>
+              </a:rPr>
+              <a:t> 달라짐</a:t>
+            </a:r>
+            <a:endParaRPr lang="en-US" altLang="ko-KR" sz="1200" b="0" i="0" kern="1200" dirty="0">
+              <a:solidFill>
+                <a:schemeClr val="tx1"/>
+              </a:solidFill>
+              <a:effectLst/>
+              <a:latin typeface="Kim jung chul Gothic Regular" panose="020B0503000000000000" pitchFamily="50" charset="-127"/>
+              <a:ea typeface="Kim jung chul Gothic Regular" panose="020B0503000000000000" pitchFamily="50" charset="-127"/>
+              <a:cs typeface="+mn-cs"/>
+            </a:endParaRPr>
+          </a:p>
+          <a:p>
+            <a:endParaRPr lang="en-US" altLang="ko-KR" sz="1200" b="0" i="0" kern="1200" dirty="0">
+              <a:solidFill>
+                <a:schemeClr val="tx1"/>
+              </a:solidFill>
+              <a:effectLst/>
+              <a:latin typeface="Kim jung chul Gothic Regular" panose="020B0503000000000000" pitchFamily="50" charset="-127"/>
+              <a:ea typeface="Kim jung chul Gothic Regular" panose="020B0503000000000000" pitchFamily="50" charset="-127"/>
+              <a:cs typeface="+mn-cs"/>
+            </a:endParaRPr>
+          </a:p>
           <a:p>
             <a:endParaRPr lang="ko-KR" altLang="en-US" dirty="0"/>
           </a:p>
@@ -2971,7 +3575,7 @@
           <a:p>
             <a:fld id="{442BEE3F-2E9A-4FD8-8B8A-8619F3E161C0}" type="datetime1">
               <a:rPr lang="ko-KR" altLang="en-US" smtClean="0"/>
-              <a:t>2025-09-01</a:t>
+              <a:t>2025-11-06</a:t>
             </a:fld>
             <a:endParaRPr lang="ko-KR" altLang="en-US"/>
           </a:p>
@@ -3258,7 +3862,7 @@
           <a:p>
             <a:fld id="{0F78D9C4-20C1-4B15-A116-16DC77AD9A1E}" type="datetime1">
               <a:rPr lang="ko-KR" altLang="en-US" smtClean="0"/>
-              <a:t>2025-09-01</a:t>
+              <a:t>2025-11-06</a:t>
             </a:fld>
             <a:endParaRPr lang="ko-KR" altLang="en-US"/>
           </a:p>
@@ -3433,7 +4037,7 @@
           <a:p>
             <a:fld id="{7F5E23C3-0E3D-4E4E-8486-D7FB4C073DC1}" type="datetime1">
               <a:rPr lang="ko-KR" altLang="en-US" smtClean="0"/>
-              <a:t>2025-09-01</a:t>
+              <a:t>2025-11-06</a:t>
             </a:fld>
             <a:endParaRPr lang="ko-KR" altLang="en-US"/>
           </a:p>
@@ -3762,7 +4366,7 @@
           <a:p>
             <a:fld id="{7F5E23C3-0E3D-4E4E-8486-D7FB4C073DC1}" type="datetime1">
               <a:rPr lang="ko-KR" altLang="en-US" smtClean="0"/>
-              <a:t>2025-09-01</a:t>
+              <a:t>2025-11-06</a:t>
             </a:fld>
             <a:endParaRPr lang="ko-KR" altLang="en-US"/>
           </a:p>
@@ -4766,7 +5370,7 @@
           <a:p>
             <a:fld id="{0F78D9C4-20C1-4B15-A116-16DC77AD9A1E}" type="datetime1">
               <a:rPr lang="ko-KR" altLang="en-US" smtClean="0"/>
-              <a:t>2025-09-01</a:t>
+              <a:t>2025-11-06</a:t>
             </a:fld>
             <a:endParaRPr lang="ko-KR" altLang="en-US"/>
           </a:p>
@@ -5242,7 +5846,7 @@
           <a:p>
             <a:fld id="{0F78D9C4-20C1-4B15-A116-16DC77AD9A1E}" type="datetime1">
               <a:rPr lang="ko-KR" altLang="en-US" smtClean="0"/>
-              <a:t>2025-09-01</a:t>
+              <a:t>2025-11-06</a:t>
             </a:fld>
             <a:endParaRPr lang="ko-KR" altLang="en-US"/>
           </a:p>
@@ -5773,7 +6377,7 @@
           <a:p>
             <a:fld id="{0F78D9C4-20C1-4B15-A116-16DC77AD9A1E}" type="datetime1">
               <a:rPr lang="ko-KR" altLang="en-US" smtClean="0"/>
-              <a:t>2025-09-01</a:t>
+              <a:t>2025-11-06</a:t>
             </a:fld>
             <a:endParaRPr lang="ko-KR" altLang="en-US"/>
           </a:p>
@@ -6272,7 +6876,7 @@
           <a:p>
             <a:fld id="{0F78D9C4-20C1-4B15-A116-16DC77AD9A1E}" type="datetime1">
               <a:rPr lang="ko-KR" altLang="en-US" smtClean="0"/>
-              <a:t>2025-09-01</a:t>
+              <a:t>2025-11-06</a:t>
             </a:fld>
             <a:endParaRPr lang="ko-KR" altLang="en-US"/>
           </a:p>
@@ -6779,7 +7383,7 @@
           <a:p>
             <a:fld id="{0F78D9C4-20C1-4B15-A116-16DC77AD9A1E}" type="datetime1">
               <a:rPr lang="ko-KR" altLang="en-US" smtClean="0"/>
-              <a:t>2025-09-01</a:t>
+              <a:t>2025-11-06</a:t>
             </a:fld>
             <a:endParaRPr lang="ko-KR" altLang="en-US"/>
           </a:p>
@@ -7382,7 +7986,7 @@
           <a:p>
             <a:fld id="{0F78D9C4-20C1-4B15-A116-16DC77AD9A1E}" type="datetime1">
               <a:rPr lang="ko-KR" altLang="en-US" smtClean="0"/>
-              <a:t>2025-09-01</a:t>
+              <a:t>2025-11-06</a:t>
             </a:fld>
             <a:endParaRPr lang="ko-KR" altLang="en-US"/>
           </a:p>
@@ -9425,7 +10029,7 @@
           <a:p>
             <a:fld id="{0F78D9C4-20C1-4B15-A116-16DC77AD9A1E}" type="datetime1">
               <a:rPr lang="ko-KR" altLang="en-US" smtClean="0"/>
-              <a:t>2025-09-01</a:t>
+              <a:t>2025-11-06</a:t>
             </a:fld>
             <a:endParaRPr lang="ko-KR" altLang="en-US"/>
           </a:p>
@@ -9591,7 +10195,7 @@
           <a:p>
             <a:fld id="{0F78D9C4-20C1-4B15-A116-16DC77AD9A1E}" type="datetime1">
               <a:rPr lang="ko-KR" altLang="en-US" smtClean="0"/>
-              <a:t>2025-09-01</a:t>
+              <a:t>2025-11-06</a:t>
             </a:fld>
             <a:endParaRPr lang="ko-KR" altLang="en-US"/>
           </a:p>
@@ -11446,7 +12050,7 @@
           <a:p>
             <a:fld id="{0F78D9C4-20C1-4B15-A116-16DC77AD9A1E}" type="datetime1">
               <a:rPr lang="ko-KR" altLang="en-US" smtClean="0"/>
-              <a:t>2025-09-01</a:t>
+              <a:t>2025-11-06</a:t>
             </a:fld>
             <a:endParaRPr lang="ko-KR" altLang="en-US"/>
           </a:p>
@@ -11811,7 +12415,7 @@
           <a:p>
             <a:fld id="{0F78D9C4-20C1-4B15-A116-16DC77AD9A1E}" type="datetime1">
               <a:rPr lang="ko-KR" altLang="en-US" smtClean="0"/>
-              <a:t>2025-09-01</a:t>
+              <a:t>2025-11-06</a:t>
             </a:fld>
             <a:endParaRPr lang="ko-KR" altLang="en-US"/>
           </a:p>
@@ -12976,7 +13580,7 @@
           <a:p>
             <a:fld id="{76022175-F16A-4A96-8E45-178BE9345AE9}" type="datetime6">
               <a:rPr lang="ko-KR" altLang="en-US" smtClean="0"/>
-              <a:t>2025년 9월</a:t>
+              <a:t>2025년 11월</a:t>
             </a:fld>
             <a:endParaRPr lang="ko-KR" altLang="en-US"/>
           </a:p>
@@ -13406,7 +14010,7 @@
           <a:p>
             <a:fld id="{76022175-F16A-4A96-8E45-178BE9345AE9}" type="datetime6">
               <a:rPr lang="ko-KR" altLang="en-US" smtClean="0"/>
-              <a:t>2025년 9월</a:t>
+              <a:t>2025년 11월</a:t>
             </a:fld>
             <a:endParaRPr lang="ko-KR" altLang="en-US"/>
           </a:p>
@@ -13824,7 +14428,7 @@
           <a:p>
             <a:fld id="{76022175-F16A-4A96-8E45-178BE9345AE9}" type="datetime6">
               <a:rPr lang="ko-KR" altLang="en-US" smtClean="0"/>
-              <a:t>2025년 9월</a:t>
+              <a:t>2025년 11월</a:t>
             </a:fld>
             <a:endParaRPr lang="ko-KR" altLang="en-US"/>
           </a:p>
@@ -14213,7 +14817,7 @@
           <a:p>
             <a:fld id="{0F78D9C4-20C1-4B15-A116-16DC77AD9A1E}" type="datetime1">
               <a:rPr lang="ko-KR" altLang="en-US" smtClean="0"/>
-              <a:t>2025-09-01</a:t>
+              <a:t>2025-11-06</a:t>
             </a:fld>
             <a:endParaRPr lang="ko-KR" altLang="en-US"/>
           </a:p>
@@ -14754,7 +15358,7 @@
           <a:p>
             <a:fld id="{0F78D9C4-20C1-4B15-A116-16DC77AD9A1E}" type="datetime1">
               <a:rPr lang="ko-KR" altLang="en-US" smtClean="0"/>
-              <a:t>2025-09-01</a:t>
+              <a:t>2025-11-06</a:t>
             </a:fld>
             <a:endParaRPr lang="ko-KR" altLang="en-US"/>
           </a:p>
@@ -15193,7 +15797,7 @@
           <a:p>
             <a:fld id="{0F78D9C4-20C1-4B15-A116-16DC77AD9A1E}" type="datetime1">
               <a:rPr lang="ko-KR" altLang="en-US" smtClean="0"/>
-              <a:t>2025-09-01</a:t>
+              <a:t>2025-11-06</a:t>
             </a:fld>
             <a:endParaRPr lang="ko-KR" altLang="en-US"/>
           </a:p>
@@ -16599,7 +17203,7 @@
           <a:p>
             <a:fld id="{0F78D9C4-20C1-4B15-A116-16DC77AD9A1E}" type="datetime1">
               <a:rPr lang="ko-KR" altLang="en-US" smtClean="0"/>
-              <a:t>2025-09-01</a:t>
+              <a:t>2025-11-06</a:t>
             </a:fld>
             <a:endParaRPr lang="ko-KR" altLang="en-US"/>
           </a:p>
@@ -17118,7 +17722,7 @@
           <a:p>
             <a:fld id="{0F78D9C4-20C1-4B15-A116-16DC77AD9A1E}" type="datetime1">
               <a:rPr lang="ko-KR" altLang="en-US" smtClean="0"/>
-              <a:t>2025-09-01</a:t>
+              <a:t>2025-11-06</a:t>
             </a:fld>
             <a:endParaRPr lang="ko-KR" altLang="en-US"/>
           </a:p>
@@ -18726,7 +19330,7 @@
                     <a:p>
                       <a:pPr algn="ctr" fontAlgn="ctr"/>
                       <a:r>
-                        <a:rPr lang="ko-KR" altLang="en-US" sz="2000" b="1" i="0" u="none" strike="noStrike">
+                        <a:rPr lang="ko-KR" altLang="en-US" sz="2000" b="1" i="0" u="none" strike="noStrike" dirty="0">
                           <a:solidFill>
                             <a:srgbClr val="000000"/>
                           </a:solidFill>
@@ -19270,7 +19874,7 @@
           <a:p>
             <a:fld id="{0F78D9C4-20C1-4B15-A116-16DC77AD9A1E}" type="datetime1">
               <a:rPr lang="ko-KR" altLang="en-US" smtClean="0"/>
-              <a:t>2025-09-01</a:t>
+              <a:t>2025-11-06</a:t>
             </a:fld>
             <a:endParaRPr lang="ko-KR" altLang="en-US"/>
           </a:p>
